--- a/slides/lecture08_internal_interrupts.pptx
+++ b/slides/lecture08_internal_interrupts.pptx
@@ -6485,6 +6485,62 @@
           </a:p>
         </p:txBody>
       </p:sp>
+      <p:sp>
+        <p:nvSpPr>
+          <p:cNvPr id="4" name="TextBox 3">
+            <a:extLst>
+              <a:ext uri="{FF2B5EF4-FFF2-40B4-BE49-F238E27FC236}">
+                <a16:creationId xmlns:a16="http://schemas.microsoft.com/office/drawing/2014/main" id="{912D3469-1018-01E6-931F-9CC7F2193996}"/>
+              </a:ext>
+            </a:extLst>
+          </p:cNvPr>
+          <p:cNvSpPr txBox="1"/>
+          <p:nvPr/>
+        </p:nvSpPr>
+        <p:spPr>
+          <a:xfrm>
+            <a:off x="3817620" y="4823460"/>
+            <a:ext cx="6992042" cy="1477328"/>
+          </a:xfrm>
+          <a:prstGeom prst="rect">
+            <a:avLst/>
+          </a:prstGeom>
+          <a:noFill/>
+        </p:spPr>
+        <p:txBody>
+          <a:bodyPr wrap="none" rtlCol="0">
+            <a:spAutoFit/>
+          </a:bodyPr>
+          <a:lstStyle/>
+          <a:p>
+            <a:r>
+              <a:rPr lang="en-US" dirty="0"/>
+              <a:t>This lecture needs modification. I thought it would go very fast, </a:t>
+            </a:r>
+          </a:p>
+          <a:p>
+            <a:r>
+              <a:rPr lang="en-US" dirty="0"/>
+              <a:t>and spent way too much time on the code demonstration. </a:t>
+            </a:r>
+          </a:p>
+          <a:p>
+            <a:r>
+              <a:rPr lang="en-US" dirty="0"/>
+              <a:t>That also did not quite work (some bug, had to revert to original code)</a:t>
+            </a:r>
+          </a:p>
+          <a:p>
+            <a:r>
+              <a:rPr lang="en-US" dirty="0"/>
+              <a:t>Maybe skip the fridge and just do the tone next year. </a:t>
+            </a:r>
+          </a:p>
+          <a:p>
+            <a:endParaRPr lang="LID4096" dirty="0"/>
+          </a:p>
+        </p:txBody>
+      </p:sp>
     </p:spTree>
     <p:extLst>
       <p:ext uri="{BB962C8B-B14F-4D97-AF65-F5344CB8AC3E}">
@@ -7683,48 +7739,6 @@
           <a:chExt cx="0" cy="0"/>
         </a:xfrm>
       </p:grpSpPr>
-      <p:pic>
-        <p:nvPicPr>
-          <p:cNvPr id="7" name="Picture 6">
-            <a:extLst>
-              <a:ext uri="{FF2B5EF4-FFF2-40B4-BE49-F238E27FC236}">
-                <a16:creationId xmlns:a16="http://schemas.microsoft.com/office/drawing/2014/main" id="{EDB99E3D-1D01-E80A-C8E8-18738C4DCA37}"/>
-              </a:ext>
-            </a:extLst>
-          </p:cNvPr>
-          <p:cNvPicPr>
-            <a:picLocks noChangeAspect="1"/>
-          </p:cNvPicPr>
-          <p:nvPr/>
-        </p:nvPicPr>
-        <p:blipFill>
-          <a:blip r:embed="rId3"/>
-          <a:stretch>
-            <a:fillRect/>
-          </a:stretch>
-        </p:blipFill>
-        <p:spPr>
-          <a:xfrm>
-            <a:off x="7650064" y="1811339"/>
-            <a:ext cx="3640087" cy="4894888"/>
-          </a:xfrm>
-          <a:prstGeom prst="rect">
-            <a:avLst/>
-          </a:prstGeom>
-          <a:ln>
-            <a:solidFill>
-              <a:schemeClr val="tx1"/>
-            </a:solidFill>
-          </a:ln>
-          <a:effectLst>
-            <a:outerShdw blurRad="50800" dist="38100" dir="2700000" algn="tl" rotWithShape="0">
-              <a:prstClr val="black">
-                <a:alpha val="40000"/>
-              </a:prstClr>
-            </a:outerShdw>
-          </a:effectLst>
-        </p:spPr>
-      </p:pic>
       <p:sp>
         <p:nvSpPr>
           <p:cNvPr id="2" name="Title 1">
@@ -7781,7 +7795,7 @@
           <p:nvPr/>
         </p:nvPicPr>
         <p:blipFill>
-          <a:blip r:embed="rId4"/>
+          <a:blip r:embed="rId3"/>
           <a:stretch>
             <a:fillRect/>
           </a:stretch>
@@ -7811,7 +7825,7 @@
           <p:nvPr/>
         </p:nvPicPr>
         <p:blipFill>
-          <a:blip r:embed="rId5"/>
+          <a:blip r:embed="rId4"/>
           <a:stretch>
             <a:fillRect/>
           </a:stretch>
@@ -8410,6 +8424,48 @@
           </p:txBody>
         </p:sp>
       </p:grpSp>
+      <p:pic>
+        <p:nvPicPr>
+          <p:cNvPr id="7" name="Picture 6">
+            <a:extLst>
+              <a:ext uri="{FF2B5EF4-FFF2-40B4-BE49-F238E27FC236}">
+                <a16:creationId xmlns:a16="http://schemas.microsoft.com/office/drawing/2014/main" id="{EDB99E3D-1D01-E80A-C8E8-18738C4DCA37}"/>
+              </a:ext>
+            </a:extLst>
+          </p:cNvPr>
+          <p:cNvPicPr>
+            <a:picLocks noChangeAspect="1"/>
+          </p:cNvPicPr>
+          <p:nvPr/>
+        </p:nvPicPr>
+        <p:blipFill>
+          <a:blip r:embed="rId5"/>
+          <a:stretch>
+            <a:fillRect/>
+          </a:stretch>
+        </p:blipFill>
+        <p:spPr>
+          <a:xfrm>
+            <a:off x="7650064" y="1811339"/>
+            <a:ext cx="3640087" cy="4894888"/>
+          </a:xfrm>
+          <a:prstGeom prst="rect">
+            <a:avLst/>
+          </a:prstGeom>
+          <a:ln>
+            <a:solidFill>
+              <a:schemeClr val="tx1"/>
+            </a:solidFill>
+          </a:ln>
+          <a:effectLst>
+            <a:outerShdw blurRad="50800" dist="38100" dir="2700000" algn="tl" rotWithShape="0">
+              <a:prstClr val="black">
+                <a:alpha val="40000"/>
+              </a:prstClr>
+            </a:outerShdw>
+          </a:effectLst>
+        </p:spPr>
+      </p:pic>
     </p:spTree>
     <p:extLst>
       <p:ext uri="{BB962C8B-B14F-4D97-AF65-F5344CB8AC3E}">
